--- a/generated/Tier 1 Broker Scorecards/Pride Insurance LLC_Broker_Scorecard.pptx
+++ b/generated/Tier 1 Broker Scorecards/Pride Insurance LLC_Broker_Scorecard.pptx
@@ -3357,7 +3357,7 @@
                         <a:rPr sz="800">
                           <a:latin typeface="Segoe UI"/>
                         </a:rPr>
-                        <a:t>$4,586,300.54 / $4,437,528.39 / $1,356,754.46</a:t>
+                        <a:t>$4,586,300.54 / $4,441,081.26 / $1,360,307.33</a:t>
                       </a:r>
                     </a:p>
                   </a:txBody>
@@ -3394,7 +3394,7 @@
                         <a:rPr sz="900">
                           <a:latin typeface="Segoe UI"/>
                         </a:rPr>
-                        <a:t>Tier 1  |  10.71% / 15.00%</a:t>
+                        <a:t>Tier 1  |  10.90% / 15.00%</a:t>
                       </a:r>
                     </a:p>
                   </a:txBody>
@@ -3431,7 +3431,7 @@
                         <a:rPr sz="900">
                           <a:latin typeface="Segoe UI"/>
                         </a:rPr>
-                        <a:t>$6,420,820.76  (21.1% achieved)</a:t>
+                        <a:t>$6,420,820.76  (21.2% achieved)</a:t>
                       </a:r>
                     </a:p>
                   </a:txBody>
@@ -3653,7 +3653,7 @@
                         <a:rPr sz="900">
                           <a:latin typeface="Segoe UI"/>
                         </a:rPr>
-                        <a:t>Fleet Subs: 35  |  Binds: 3</a:t>
+                        <a:t>Fleet Subs: 35  |  Binds: 4</a:t>
                       </a:r>
                     </a:p>
                   </a:txBody>
@@ -3690,7 +3690,7 @@
                         <a:rPr sz="900">
                           <a:latin typeface="Segoe UI"/>
                         </a:rPr>
-                        <a:t>Fleet Bound Premium: $190,018.56</a:t>
+                        <a:t>Fleet Bound Premium: $234,148.26</a:t>
                       </a:r>
                     </a:p>
                   </a:txBody>
@@ -3727,7 +3727,7 @@
                         <a:rPr sz="900">
                           <a:latin typeface="Segoe UI"/>
                         </a:rPr>
-                        <a:t>Fleet Book %: 14.0%</a:t>
+                        <a:t>Fleet Book %: 17.2%</a:t>
                       </a:r>
                     </a:p>
                   </a:txBody>
@@ -3766,7 +3766,7 @@
                         <a:rPr sz="900">
                           <a:latin typeface="Segoe UI"/>
                         </a:rPr>
-                        <a:t>Non-Fleet Subs: 376  |  Binds: 41</a:t>
+                        <a:t>Non-Fleet Subs: 378  |  Binds: 41</a:t>
                       </a:r>
                     </a:p>
                   </a:txBody>
@@ -3803,7 +3803,7 @@
                         <a:rPr sz="900">
                           <a:latin typeface="Segoe UI"/>
                         </a:rPr>
-                        <a:t>Non-Fleet Bound Premium: $1,166,735.90</a:t>
+                        <a:t>Non-Fleet Bound Premium: $1,126,159.07</a:t>
                       </a:r>
                     </a:p>
                   </a:txBody>
@@ -3840,7 +3840,7 @@
                         <a:rPr sz="900">
                           <a:latin typeface="Segoe UI"/>
                         </a:rPr>
-                        <a:t>Non-Fleet Book %: 86.0%</a:t>
+                        <a:t>Non-Fleet Book %: 82.8%</a:t>
                       </a:r>
                     </a:p>
                   </a:txBody>
@@ -4428,7 +4428,7 @@
                           </a:solidFill>
                           <a:latin typeface="Segoe UI"/>
                         </a:rPr>
-                        <a:t>53</a:t>
+                        <a:t>56</a:t>
                       </a:r>
                     </a:p>
                   </a:txBody>
@@ -4581,7 +4581,7 @@
                         <a:rPr sz="800">
                           <a:latin typeface="Segoe UI"/>
                         </a:rPr>
-                        <a:t>35.4%</a:t>
+                        <a:t>32.3%</a:t>
                       </a:r>
                     </a:p>
                   </a:txBody>
@@ -4624,7 +4624,7 @@
                           </a:solidFill>
                           <a:latin typeface="Segoe UI"/>
                         </a:rPr>
-                        <a:t>16.0%</a:t>
+                        <a:t>17.0%</a:t>
                       </a:r>
                     </a:p>
                   </a:txBody>
@@ -4707,7 +4707,7 @@
                           </a:solidFill>
                           <a:latin typeface="Segoe UI"/>
                         </a:rPr>
-                        <a:t>15.1%</a:t>
+                        <a:t>16.1%</a:t>
                       </a:r>
                     </a:p>
                   </a:txBody>
@@ -4747,7 +4747,7 @@
                         <a:rPr sz="800">
                           <a:latin typeface="Segoe UI"/>
                         </a:rPr>
-                        <a:t>27.0%</a:t>
+                        <a:t>26.0%</a:t>
                       </a:r>
                     </a:p>
                   </a:txBody>
@@ -4866,7 +4866,7 @@
                         <a:rPr sz="800">
                           <a:latin typeface="Segoe UI"/>
                         </a:rPr>
-                        <a:t>35</a:t>
+                        <a:t>32</a:t>
                       </a:r>
                     </a:p>
                   </a:txBody>
@@ -4906,7 +4906,7 @@
                           </a:solidFill>
                           <a:latin typeface="Segoe UI"/>
                         </a:rPr>
-                        <a:t>15</a:t>
+                        <a:t>16</a:t>
                       </a:r>
                     </a:p>
                   </a:txBody>
@@ -4983,7 +4983,7 @@
                           </a:solidFill>
                           <a:latin typeface="Segoe UI"/>
                         </a:rPr>
-                        <a:t>8</a:t>
+                        <a:t>9</a:t>
                       </a:r>
                     </a:p>
                   </a:txBody>
@@ -5020,7 +5020,7 @@
                         <a:rPr sz="800">
                           <a:latin typeface="Segoe UI"/>
                         </a:rPr>
-                        <a:t>27</a:t>
+                        <a:t>26</a:t>
                       </a:r>
                     </a:p>
                   </a:txBody>
@@ -5262,7 +5262,7 @@
                           </a:solidFill>
                           <a:latin typeface="Segoe UI"/>
                         </a:rPr>
-                        <a:t>$145.0K</a:t>
+                        <a:t>$148.5K</a:t>
                       </a:r>
                     </a:p>
                   </a:txBody>

--- a/generated/Tier 1 Broker Scorecards/Pride Insurance LLC_Broker_Scorecard.pptx
+++ b/generated/Tier 1 Broker Scorecards/Pride Insurance LLC_Broker_Scorecard.pptx
@@ -3394,7 +3394,7 @@
                         <a:rPr sz="900">
                           <a:latin typeface="Segoe UI"/>
                         </a:rPr>
-                        <a:t>Tier 1  |  10.90% / 15.00%</a:t>
+                        <a:t>Tier 1  |  10.50% / 15.00%</a:t>
                       </a:r>
                     </a:p>
                   </a:txBody>
@@ -3690,7 +3690,7 @@
                         <a:rPr sz="900">
                           <a:latin typeface="Segoe UI"/>
                         </a:rPr>
-                        <a:t>Fleet Bound Premium: $234,148.26</a:t>
+                        <a:t>Fleet Bound Premium: $231,387.41</a:t>
                       </a:r>
                     </a:p>
                   </a:txBody>
@@ -3727,7 +3727,7 @@
                         <a:rPr sz="900">
                           <a:latin typeface="Segoe UI"/>
                         </a:rPr>
-                        <a:t>Fleet Book %: 17.2%</a:t>
+                        <a:t>Fleet Book %: 17.0%</a:t>
                       </a:r>
                     </a:p>
                   </a:txBody>
@@ -3766,7 +3766,7 @@
                         <a:rPr sz="900">
                           <a:latin typeface="Segoe UI"/>
                         </a:rPr>
-                        <a:t>Non-Fleet Subs: 378  |  Binds: 41</a:t>
+                        <a:t>Non-Fleet Subs: 384  |  Binds: 40</a:t>
                       </a:r>
                     </a:p>
                   </a:txBody>
@@ -3803,7 +3803,7 @@
                         <a:rPr sz="900">
                           <a:latin typeface="Segoe UI"/>
                         </a:rPr>
-                        <a:t>Non-Fleet Bound Premium: $1,126,159.07</a:t>
+                        <a:t>Non-Fleet Bound Premium: $1,128,919.92</a:t>
                       </a:r>
                     </a:p>
                   </a:txBody>
@@ -3840,7 +3840,7 @@
                         <a:rPr sz="900">
                           <a:latin typeface="Segoe UI"/>
                         </a:rPr>
-                        <a:t>Non-Fleet Book %: 82.8%</a:t>
+                        <a:t>Non-Fleet Book %: 83.0%</a:t>
                       </a:r>
                     </a:p>
                   </a:txBody>
@@ -4428,7 +4428,7 @@
                           </a:solidFill>
                           <a:latin typeface="Segoe UI"/>
                         </a:rPr>
-                        <a:t>56</a:t>
+                        <a:t>66</a:t>
                       </a:r>
                     </a:p>
                   </a:txBody>
@@ -4581,7 +4581,7 @@
                         <a:rPr sz="800">
                           <a:latin typeface="Segoe UI"/>
                         </a:rPr>
-                        <a:t>32.3%</a:t>
+                        <a:t>34.3%</a:t>
                       </a:r>
                     </a:p>
                   </a:txBody>
@@ -4707,7 +4707,7 @@
                           </a:solidFill>
                           <a:latin typeface="Segoe UI"/>
                         </a:rPr>
-                        <a:t>16.1%</a:t>
+                        <a:t>13.6%</a:t>
                       </a:r>
                     </a:p>
                   </a:txBody>
@@ -4866,7 +4866,7 @@
                         <a:rPr sz="800">
                           <a:latin typeface="Segoe UI"/>
                         </a:rPr>
-                        <a:t>32</a:t>
+                        <a:t>34</a:t>
                       </a:r>
                     </a:p>
                   </a:txBody>

--- a/generated/Tier 1 Broker Scorecards/Pride Insurance LLC_Broker_Scorecard.pptx
+++ b/generated/Tier 1 Broker Scorecards/Pride Insurance LLC_Broker_Scorecard.pptx
@@ -3357,7 +3357,7 @@
                         <a:rPr sz="800">
                           <a:latin typeface="Segoe UI"/>
                         </a:rPr>
-                        <a:t>$4,586,300.54 / $4,441,081.26 / $1,360,307.33</a:t>
+                        <a:t>$4,586,300.54 / $4,436,566.39 / $1,355,792.46</a:t>
                       </a:r>
                     </a:p>
                   </a:txBody>
@@ -3394,7 +3394,7 @@
                         <a:rPr sz="900">
                           <a:latin typeface="Segoe UI"/>
                         </a:rPr>
-                        <a:t>Tier 1  |  10.50% / 15.00%</a:t>
+                        <a:t>Tier 1  |  10.93% / 15.00%</a:t>
                       </a:r>
                     </a:p>
                   </a:txBody>
@@ -3431,7 +3431,7 @@
                         <a:rPr sz="900">
                           <a:latin typeface="Segoe UI"/>
                         </a:rPr>
-                        <a:t>$6,420,820.76  (21.2% achieved)</a:t>
+                        <a:t>$6,420,820.76  (21.1% achieved)</a:t>
                       </a:r>
                     </a:p>
                   </a:txBody>
@@ -3690,7 +3690,7 @@
                         <a:rPr sz="900">
                           <a:latin typeface="Segoe UI"/>
                         </a:rPr>
-                        <a:t>Fleet Bound Premium: $231,387.41</a:t>
+                        <a:t>Fleet Bound Premium: $225,230.12</a:t>
                       </a:r>
                     </a:p>
                   </a:txBody>
@@ -3727,7 +3727,7 @@
                         <a:rPr sz="900">
                           <a:latin typeface="Segoe UI"/>
                         </a:rPr>
-                        <a:t>Fleet Book %: 17.0%</a:t>
+                        <a:t>Fleet Book %: 16.6%</a:t>
                       </a:r>
                     </a:p>
                   </a:txBody>
@@ -3766,7 +3766,7 @@
                         <a:rPr sz="900">
                           <a:latin typeface="Segoe UI"/>
                         </a:rPr>
-                        <a:t>Non-Fleet Subs: 384  |  Binds: 40</a:t>
+                        <a:t>Non-Fleet Subs: 386  |  Binds: 42</a:t>
                       </a:r>
                     </a:p>
                   </a:txBody>
@@ -3803,7 +3803,7 @@
                         <a:rPr sz="900">
                           <a:latin typeface="Segoe UI"/>
                         </a:rPr>
-                        <a:t>Non-Fleet Bound Premium: $1,128,919.92</a:t>
+                        <a:t>Non-Fleet Bound Premium: $1,130,562.34</a:t>
                       </a:r>
                     </a:p>
                   </a:txBody>
@@ -3840,7 +3840,7 @@
                         <a:rPr sz="900">
                           <a:latin typeface="Segoe UI"/>
                         </a:rPr>
-                        <a:t>Non-Fleet Book %: 83.0%</a:t>
+                        <a:t>Non-Fleet Book %: 83.4%</a:t>
                       </a:r>
                     </a:p>
                   </a:txBody>
@@ -4428,7 +4428,7 @@
                           </a:solidFill>
                           <a:latin typeface="Segoe UI"/>
                         </a:rPr>
-                        <a:t>66</a:t>
+                        <a:t>69</a:t>
                       </a:r>
                     </a:p>
                   </a:txBody>
@@ -4624,7 +4624,7 @@
                           </a:solidFill>
                           <a:latin typeface="Segoe UI"/>
                         </a:rPr>
-                        <a:t>17.0%</a:t>
+                        <a:t>18.1%</a:t>
                       </a:r>
                     </a:p>
                   </a:txBody>
@@ -4707,7 +4707,7 @@
                           </a:solidFill>
                           <a:latin typeface="Segoe UI"/>
                         </a:rPr>
-                        <a:t>13.6%</a:t>
+                        <a:t>14.5%</a:t>
                       </a:r>
                     </a:p>
                   </a:txBody>
@@ -4906,7 +4906,7 @@
                           </a:solidFill>
                           <a:latin typeface="Segoe UI"/>
                         </a:rPr>
-                        <a:t>16</a:t>
+                        <a:t>17</a:t>
                       </a:r>
                     </a:p>
                   </a:txBody>
@@ -4983,7 +4983,7 @@
                           </a:solidFill>
                           <a:latin typeface="Segoe UI"/>
                         </a:rPr>
-                        <a:t>9</a:t>
+                        <a:t>10</a:t>
                       </a:r>
                     </a:p>
                   </a:txBody>
@@ -5262,7 +5262,7 @@
                           </a:solidFill>
                           <a:latin typeface="Segoe UI"/>
                         </a:rPr>
-                        <a:t>$148.5K</a:t>
+                        <a:t>$144.0K</a:t>
                       </a:r>
                     </a:p>
                   </a:txBody>

--- a/generated/Tier 1 Broker Scorecards/Pride Insurance LLC_Broker_Scorecard.pptx
+++ b/generated/Tier 1 Broker Scorecards/Pride Insurance LLC_Broker_Scorecard.pptx
@@ -3394,7 +3394,7 @@
                         <a:rPr sz="900">
                           <a:latin typeface="Segoe UI"/>
                         </a:rPr>
-                        <a:t>Tier 1  |  10.93% / 15.00%</a:t>
+                        <a:t>Tier 1  |  10.66% / 15.00%</a:t>
                       </a:r>
                     </a:p>
                   </a:txBody>
@@ -3653,7 +3653,7 @@
                         <a:rPr sz="900">
                           <a:latin typeface="Segoe UI"/>
                         </a:rPr>
-                        <a:t>Fleet Subs: 35  |  Binds: 4</a:t>
+                        <a:t>Fleet Subs: 36  |  Binds: 5</a:t>
                       </a:r>
                     </a:p>
                   </a:txBody>
@@ -3690,7 +3690,7 @@
                         <a:rPr sz="900">
                           <a:latin typeface="Segoe UI"/>
                         </a:rPr>
-                        <a:t>Fleet Bound Premium: $225,230.12</a:t>
+                        <a:t>Fleet Bound Premium: $336,218.18</a:t>
                       </a:r>
                     </a:p>
                   </a:txBody>
@@ -3727,7 +3727,7 @@
                         <a:rPr sz="900">
                           <a:latin typeface="Segoe UI"/>
                         </a:rPr>
-                        <a:t>Fleet Book %: 16.6%</a:t>
+                        <a:t>Fleet Book %: 24.8%</a:t>
                       </a:r>
                     </a:p>
                   </a:txBody>
@@ -3766,7 +3766,7 @@
                         <a:rPr sz="900">
                           <a:latin typeface="Segoe UI"/>
                         </a:rPr>
-                        <a:t>Non-Fleet Subs: 386  |  Binds: 42</a:t>
+                        <a:t>Non-Fleet Subs: 386  |  Binds: 40</a:t>
                       </a:r>
                     </a:p>
                   </a:txBody>
@@ -3803,7 +3803,7 @@
                         <a:rPr sz="900">
                           <a:latin typeface="Segoe UI"/>
                         </a:rPr>
-                        <a:t>Non-Fleet Bound Premium: $1,130,562.34</a:t>
+                        <a:t>Non-Fleet Bound Premium: $1,019,574.28</a:t>
                       </a:r>
                     </a:p>
                   </a:txBody>
@@ -3840,7 +3840,7 @@
                         <a:rPr sz="900">
                           <a:latin typeface="Segoe UI"/>
                         </a:rPr>
-                        <a:t>Non-Fleet Book %: 83.4%</a:t>
+                        <a:t>Non-Fleet Book %: 75.2%</a:t>
                       </a:r>
                     </a:p>
                   </a:txBody>
@@ -4428,7 +4428,7 @@
                           </a:solidFill>
                           <a:latin typeface="Segoe UI"/>
                         </a:rPr>
-                        <a:t>69</a:t>
+                        <a:t>70</a:t>
                       </a:r>
                     </a:p>
                   </a:txBody>
@@ -4581,7 +4581,7 @@
                         <a:rPr sz="800">
                           <a:latin typeface="Segoe UI"/>
                         </a:rPr>
-                        <a:t>34.3%</a:t>
+                        <a:t>32.3%</a:t>
                       </a:r>
                     </a:p>
                   </a:txBody>
@@ -4707,7 +4707,7 @@
                           </a:solidFill>
                           <a:latin typeface="Segoe UI"/>
                         </a:rPr>
-                        <a:t>14.5%</a:t>
+                        <a:t>14.3%</a:t>
                       </a:r>
                     </a:p>
                   </a:txBody>
@@ -4747,7 +4747,7 @@
                         <a:rPr sz="800">
                           <a:latin typeface="Segoe UI"/>
                         </a:rPr>
-                        <a:t>26.0%</a:t>
+                        <a:t>27.0%</a:t>
                       </a:r>
                     </a:p>
                   </a:txBody>
@@ -4866,7 +4866,7 @@
                         <a:rPr sz="800">
                           <a:latin typeface="Segoe UI"/>
                         </a:rPr>
-                        <a:t>34</a:t>
+                        <a:t>32</a:t>
                       </a:r>
                     </a:p>
                   </a:txBody>
@@ -5020,7 +5020,7 @@
                         <a:rPr sz="800">
                           <a:latin typeface="Segoe UI"/>
                         </a:rPr>
-                        <a:t>26</a:t>
+                        <a:t>27</a:t>
                       </a:r>
                     </a:p>
                   </a:txBody>

--- a/generated/Tier 1 Broker Scorecards/Pride Insurance LLC_Broker_Scorecard.pptx
+++ b/generated/Tier 1 Broker Scorecards/Pride Insurance LLC_Broker_Scorecard.pptx
@@ -3357,7 +3357,7 @@
                         <a:rPr sz="800">
                           <a:latin typeface="Segoe UI"/>
                         </a:rPr>
-                        <a:t>$4,586,300.54 / $4,436,566.39 / $1,355,792.46</a:t>
+                        <a:t>$4,586,300.54 / $4,452,142.28 / $1,371,368.35</a:t>
                       </a:r>
                     </a:p>
                   </a:txBody>
@@ -3394,7 +3394,7 @@
                         <a:rPr sz="900">
                           <a:latin typeface="Segoe UI"/>
                         </a:rPr>
-                        <a:t>Tier 1  |  10.66% / 15.00%</a:t>
+                        <a:t>Tier 1  |  11.03% / 15.00%</a:t>
                       </a:r>
                     </a:p>
                   </a:txBody>
@@ -3431,7 +3431,7 @@
                         <a:rPr sz="900">
                           <a:latin typeface="Segoe UI"/>
                         </a:rPr>
-                        <a:t>$6,420,820.76  (21.1% achieved)</a:t>
+                        <a:t>$6,420,820.76  (21.4% achieved)</a:t>
                       </a:r>
                     </a:p>
                   </a:txBody>
@@ -3653,7 +3653,7 @@
                         <a:rPr sz="900">
                           <a:latin typeface="Segoe UI"/>
                         </a:rPr>
-                        <a:t>Fleet Subs: 36  |  Binds: 5</a:t>
+                        <a:t>Fleet Subs: 37  |  Binds: 5</a:t>
                       </a:r>
                     </a:p>
                   </a:txBody>
@@ -3690,7 +3690,7 @@
                         <a:rPr sz="900">
                           <a:latin typeface="Segoe UI"/>
                         </a:rPr>
-                        <a:t>Fleet Bound Premium: $336,218.18</a:t>
+                        <a:t>Fleet Bound Premium: $334,670.93</a:t>
                       </a:r>
                     </a:p>
                   </a:txBody>
@@ -3727,7 +3727,7 @@
                         <a:rPr sz="900">
                           <a:latin typeface="Segoe UI"/>
                         </a:rPr>
-                        <a:t>Fleet Book %: 24.8%</a:t>
+                        <a:t>Fleet Book %: 24.4%</a:t>
                       </a:r>
                     </a:p>
                   </a:txBody>
@@ -3766,7 +3766,7 @@
                         <a:rPr sz="900">
                           <a:latin typeface="Segoe UI"/>
                         </a:rPr>
-                        <a:t>Non-Fleet Subs: 386  |  Binds: 40</a:t>
+                        <a:t>Non-Fleet Subs: 389  |  Binds: 42</a:t>
                       </a:r>
                     </a:p>
                   </a:txBody>
@@ -3803,7 +3803,7 @@
                         <a:rPr sz="900">
                           <a:latin typeface="Segoe UI"/>
                         </a:rPr>
-                        <a:t>Non-Fleet Bound Premium: $1,019,574.28</a:t>
+                        <a:t>Non-Fleet Bound Premium: $1,036,697.42</a:t>
                       </a:r>
                     </a:p>
                   </a:txBody>
@@ -3840,7 +3840,7 @@
                         <a:rPr sz="900">
                           <a:latin typeface="Segoe UI"/>
                         </a:rPr>
-                        <a:t>Non-Fleet Book %: 75.2%</a:t>
+                        <a:t>Non-Fleet Book %: 75.6%</a:t>
                       </a:r>
                     </a:p>
                   </a:txBody>
@@ -4428,7 +4428,7 @@
                           </a:solidFill>
                           <a:latin typeface="Segoe UI"/>
                         </a:rPr>
-                        <a:t>70</a:t>
+                        <a:t>78</a:t>
                       </a:r>
                     </a:p>
                   </a:txBody>
@@ -4581,7 +4581,7 @@
                         <a:rPr sz="800">
                           <a:latin typeface="Segoe UI"/>
                         </a:rPr>
-                        <a:t>32.3%</a:t>
+                        <a:t>34.3%</a:t>
                       </a:r>
                     </a:p>
                   </a:txBody>
@@ -4624,7 +4624,7 @@
                           </a:solidFill>
                           <a:latin typeface="Segoe UI"/>
                         </a:rPr>
-                        <a:t>18.1%</a:t>
+                        <a:t>19.1%</a:t>
                       </a:r>
                     </a:p>
                   </a:txBody>
@@ -4707,7 +4707,7 @@
                           </a:solidFill>
                           <a:latin typeface="Segoe UI"/>
                         </a:rPr>
-                        <a:t>14.3%</a:t>
+                        <a:t>12.8%</a:t>
                       </a:r>
                     </a:p>
                   </a:txBody>
@@ -4747,7 +4747,7 @@
                         <a:rPr sz="800">
                           <a:latin typeface="Segoe UI"/>
                         </a:rPr>
-                        <a:t>27.0%</a:t>
+                        <a:t>26.0%</a:t>
                       </a:r>
                     </a:p>
                   </a:txBody>
@@ -4866,7 +4866,7 @@
                         <a:rPr sz="800">
                           <a:latin typeface="Segoe UI"/>
                         </a:rPr>
-                        <a:t>32</a:t>
+                        <a:t>34</a:t>
                       </a:r>
                     </a:p>
                   </a:txBody>
@@ -4906,7 +4906,7 @@
                           </a:solidFill>
                           <a:latin typeface="Segoe UI"/>
                         </a:rPr>
-                        <a:t>17</a:t>
+                        <a:t>18</a:t>
                       </a:r>
                     </a:p>
                   </a:txBody>
@@ -5020,7 +5020,7 @@
                         <a:rPr sz="800">
                           <a:latin typeface="Segoe UI"/>
                         </a:rPr>
-                        <a:t>27</a:t>
+                        <a:t>26</a:t>
                       </a:r>
                     </a:p>
                   </a:txBody>
@@ -5262,7 +5262,7 @@
                           </a:solidFill>
                           <a:latin typeface="Segoe UI"/>
                         </a:rPr>
-                        <a:t>$144.0K</a:t>
+                        <a:t>$159.6K</a:t>
                       </a:r>
                     </a:p>
                   </a:txBody>

--- a/generated/Tier 1 Broker Scorecards/Pride Insurance LLC_Broker_Scorecard.pptx
+++ b/generated/Tier 1 Broker Scorecards/Pride Insurance LLC_Broker_Scorecard.pptx
@@ -3394,7 +3394,7 @@
                         <a:rPr sz="900">
                           <a:latin typeface="Segoe UI"/>
                         </a:rPr>
-                        <a:t>Tier 1  |  11.03% / 15.00%</a:t>
+                        <a:t>Tier 1  |  10.80% / 15.00%</a:t>
                       </a:r>
                     </a:p>
                   </a:txBody>
@@ -3653,7 +3653,7 @@
                         <a:rPr sz="900">
                           <a:latin typeface="Segoe UI"/>
                         </a:rPr>
-                        <a:t>Fleet Subs: 37  |  Binds: 5</a:t>
+                        <a:t>Fleet Subs: 36  |  Binds: 5</a:t>
                       </a:r>
                     </a:p>
                   </a:txBody>
@@ -3690,7 +3690,7 @@
                         <a:rPr sz="900">
                           <a:latin typeface="Segoe UI"/>
                         </a:rPr>
-                        <a:t>Fleet Bound Premium: $334,670.93</a:t>
+                        <a:t>Fleet Bound Premium: $339,365.30</a:t>
                       </a:r>
                     </a:p>
                   </a:txBody>
@@ -3727,7 +3727,7 @@
                         <a:rPr sz="900">
                           <a:latin typeface="Segoe UI"/>
                         </a:rPr>
-                        <a:t>Fleet Book %: 24.4%</a:t>
+                        <a:t>Fleet Book %: 24.7%</a:t>
                       </a:r>
                     </a:p>
                   </a:txBody>
@@ -3766,7 +3766,7 @@
                         <a:rPr sz="900">
                           <a:latin typeface="Segoe UI"/>
                         </a:rPr>
-                        <a:t>Non-Fleet Subs: 389  |  Binds: 42</a:t>
+                        <a:t>Non-Fleet Subs: 390  |  Binds: 41</a:t>
                       </a:r>
                     </a:p>
                   </a:txBody>
@@ -3803,7 +3803,7 @@
                         <a:rPr sz="900">
                           <a:latin typeface="Segoe UI"/>
                         </a:rPr>
-                        <a:t>Non-Fleet Bound Premium: $1,036,697.42</a:t>
+                        <a:t>Non-Fleet Bound Premium: $1,032,003.05</a:t>
                       </a:r>
                     </a:p>
                   </a:txBody>
@@ -3840,7 +3840,7 @@
                         <a:rPr sz="900">
                           <a:latin typeface="Segoe UI"/>
                         </a:rPr>
-                        <a:t>Non-Fleet Book %: 75.6%</a:t>
+                        <a:t>Non-Fleet Book %: 75.3%</a:t>
                       </a:r>
                     </a:p>
                   </a:txBody>
@@ -4624,7 +4624,7 @@
                           </a:solidFill>
                           <a:latin typeface="Segoe UI"/>
                         </a:rPr>
-                        <a:t>19.1%</a:t>
+                        <a:t>18.1%</a:t>
                       </a:r>
                     </a:p>
                   </a:txBody>
@@ -4906,7 +4906,7 @@
                           </a:solidFill>
                           <a:latin typeface="Segoe UI"/>
                         </a:rPr>
-                        <a:t>18</a:t>
+                        <a:t>17</a:t>
                       </a:r>
                     </a:p>
                   </a:txBody>

--- a/generated/Tier 1 Broker Scorecards/Pride Insurance LLC_Broker_Scorecard.pptx
+++ b/generated/Tier 1 Broker Scorecards/Pride Insurance LLC_Broker_Scorecard.pptx
@@ -4581,7 +4581,7 @@
                         <a:rPr sz="800">
                           <a:latin typeface="Segoe UI"/>
                         </a:rPr>
-                        <a:t>34.3%</a:t>
+                        <a:t>33.3%</a:t>
                       </a:r>
                     </a:p>
                   </a:txBody>
@@ -4866,7 +4866,7 @@
                         <a:rPr sz="800">
                           <a:latin typeface="Segoe UI"/>
                         </a:rPr>
-                        <a:t>34</a:t>
+                        <a:t>33</a:t>
                       </a:r>
                     </a:p>
                   </a:txBody>

--- a/generated/Tier 1 Broker Scorecards/Pride Insurance LLC_Broker_Scorecard.pptx
+++ b/generated/Tier 1 Broker Scorecards/Pride Insurance LLC_Broker_Scorecard.pptx
@@ -4581,7 +4581,7 @@
                         <a:rPr sz="800">
                           <a:latin typeface="Segoe UI"/>
                         </a:rPr>
-                        <a:t>33.3%</a:t>
+                        <a:t>34.3%</a:t>
                       </a:r>
                     </a:p>
                   </a:txBody>
@@ -4747,7 +4747,7 @@
                         <a:rPr sz="800">
                           <a:latin typeface="Segoe UI"/>
                         </a:rPr>
-                        <a:t>26.0%</a:t>
+                        <a:t>27.0%</a:t>
                       </a:r>
                     </a:p>
                   </a:txBody>
@@ -4866,7 +4866,7 @@
                         <a:rPr sz="800">
                           <a:latin typeface="Segoe UI"/>
                         </a:rPr>
-                        <a:t>33</a:t>
+                        <a:t>34</a:t>
                       </a:r>
                     </a:p>
                   </a:txBody>
@@ -5020,7 +5020,7 @@
                         <a:rPr sz="800">
                           <a:latin typeface="Segoe UI"/>
                         </a:rPr>
-                        <a:t>26</a:t>
+                        <a:t>27</a:t>
                       </a:r>
                     </a:p>
                   </a:txBody>

--- a/generated/Tier 1 Broker Scorecards/Pride Insurance LLC_Broker_Scorecard.pptx
+++ b/generated/Tier 1 Broker Scorecards/Pride Insurance LLC_Broker_Scorecard.pptx
@@ -3357,7 +3357,7 @@
                         <a:rPr sz="800">
                           <a:latin typeface="Segoe UI"/>
                         </a:rPr>
-                        <a:t>$4,586,300.54 / $4,452,142.28 / $1,371,368.35</a:t>
+                        <a:t>$4,586,300.54 / $4,452,264.37 / $1,371,490.44</a:t>
                       </a:r>
                     </a:p>
                   </a:txBody>
@@ -3394,7 +3394,7 @@
                         <a:rPr sz="900">
                           <a:latin typeface="Segoe UI"/>
                         </a:rPr>
-                        <a:t>Tier 1  |  10.80% / 15.00%</a:t>
+                        <a:t>Tier 1  |  11.21% / 15.00%</a:t>
                       </a:r>
                     </a:p>
                   </a:txBody>
@@ -3653,7 +3653,7 @@
                         <a:rPr sz="900">
                           <a:latin typeface="Segoe UI"/>
                         </a:rPr>
-                        <a:t>Fleet Subs: 36  |  Binds: 5</a:t>
+                        <a:t>Fleet Subs: 36  |  Binds: 6</a:t>
                       </a:r>
                     </a:p>
                   </a:txBody>
@@ -3690,7 +3690,7 @@
                         <a:rPr sz="900">
                           <a:latin typeface="Segoe UI"/>
                         </a:rPr>
-                        <a:t>Fleet Bound Premium: $339,365.30</a:t>
+                        <a:t>Fleet Bound Premium: $381,044.73</a:t>
                       </a:r>
                     </a:p>
                   </a:txBody>
@@ -3727,7 +3727,7 @@
                         <a:rPr sz="900">
                           <a:latin typeface="Segoe UI"/>
                         </a:rPr>
-                        <a:t>Fleet Book %: 24.7%</a:t>
+                        <a:t>Fleet Book %: 27.8%</a:t>
                       </a:r>
                     </a:p>
                   </a:txBody>
@@ -3766,7 +3766,7 @@
                         <a:rPr sz="900">
                           <a:latin typeface="Segoe UI"/>
                         </a:rPr>
-                        <a:t>Non-Fleet Subs: 390  |  Binds: 41</a:t>
+                        <a:t>Non-Fleet Subs: 392  |  Binds: 42</a:t>
                       </a:r>
                     </a:p>
                   </a:txBody>
@@ -3803,7 +3803,7 @@
                         <a:rPr sz="900">
                           <a:latin typeface="Segoe UI"/>
                         </a:rPr>
-                        <a:t>Non-Fleet Bound Premium: $1,032,003.05</a:t>
+                        <a:t>Non-Fleet Bound Premium: $990,445.71</a:t>
                       </a:r>
                     </a:p>
                   </a:txBody>
@@ -3840,7 +3840,7 @@
                         <a:rPr sz="900">
                           <a:latin typeface="Segoe UI"/>
                         </a:rPr>
-                        <a:t>Non-Fleet Book %: 75.3%</a:t>
+                        <a:t>Non-Fleet Book %: 72.2%</a:t>
                       </a:r>
                     </a:p>
                   </a:txBody>
@@ -4428,7 +4428,7 @@
                           </a:solidFill>
                           <a:latin typeface="Segoe UI"/>
                         </a:rPr>
-                        <a:t>78</a:t>
+                        <a:t>80</a:t>
                       </a:r>
                     </a:p>
                   </a:txBody>
@@ -4581,7 +4581,7 @@
                         <a:rPr sz="800">
                           <a:latin typeface="Segoe UI"/>
                         </a:rPr>
-                        <a:t>34.3%</a:t>
+                        <a:t>32.3%</a:t>
                       </a:r>
                     </a:p>
                   </a:txBody>
@@ -4624,7 +4624,7 @@
                           </a:solidFill>
                           <a:latin typeface="Segoe UI"/>
                         </a:rPr>
-                        <a:t>18.1%</a:t>
+                        <a:t>19.1%</a:t>
                       </a:r>
                     </a:p>
                   </a:txBody>
@@ -4707,7 +4707,7 @@
                           </a:solidFill>
                           <a:latin typeface="Segoe UI"/>
                         </a:rPr>
-                        <a:t>12.8%</a:t>
+                        <a:t>16.2%</a:t>
                       </a:r>
                     </a:p>
                   </a:txBody>
@@ -4747,7 +4747,7 @@
                         <a:rPr sz="800">
                           <a:latin typeface="Segoe UI"/>
                         </a:rPr>
-                        <a:t>27.0%</a:t>
+                        <a:t>26.0%</a:t>
                       </a:r>
                     </a:p>
                   </a:txBody>
@@ -4866,7 +4866,7 @@
                         <a:rPr sz="800">
                           <a:latin typeface="Segoe UI"/>
                         </a:rPr>
-                        <a:t>34</a:t>
+                        <a:t>32</a:t>
                       </a:r>
                     </a:p>
                   </a:txBody>
@@ -4906,7 +4906,7 @@
                           </a:solidFill>
                           <a:latin typeface="Segoe UI"/>
                         </a:rPr>
-                        <a:t>17</a:t>
+                        <a:t>18</a:t>
                       </a:r>
                     </a:p>
                   </a:txBody>
@@ -4983,7 +4983,7 @@
                           </a:solidFill>
                           <a:latin typeface="Segoe UI"/>
                         </a:rPr>
-                        <a:t>10</a:t>
+                        <a:t>13</a:t>
                       </a:r>
                     </a:p>
                   </a:txBody>
@@ -5020,7 +5020,7 @@
                         <a:rPr sz="800">
                           <a:latin typeface="Segoe UI"/>
                         </a:rPr>
-                        <a:t>27</a:t>
+                        <a:t>26</a:t>
                       </a:r>
                     </a:p>
                   </a:txBody>
@@ -5262,7 +5262,7 @@
                           </a:solidFill>
                           <a:latin typeface="Segoe UI"/>
                         </a:rPr>
-                        <a:t>$159.6K</a:t>
+                        <a:t>$159.7K</a:t>
                       </a:r>
                     </a:p>
                   </a:txBody>

--- a/generated/Tier 1 Broker Scorecards/Pride Insurance LLC_Broker_Scorecard.pptx
+++ b/generated/Tier 1 Broker Scorecards/Pride Insurance LLC_Broker_Scorecard.pptx
@@ -3394,7 +3394,7 @@
                         <a:rPr sz="900">
                           <a:latin typeface="Segoe UI"/>
                         </a:rPr>
-                        <a:t>Tier 1  |  11.21% / 15.00%</a:t>
+                        <a:t>Tier 1  |  10.65% / 15.00%</a:t>
                       </a:r>
                     </a:p>
                   </a:txBody>
@@ -3653,7 +3653,7 @@
                         <a:rPr sz="900">
                           <a:latin typeface="Segoe UI"/>
                         </a:rPr>
-                        <a:t>Fleet Subs: 36  |  Binds: 6</a:t>
+                        <a:t>Fleet Subs: 37  |  Binds: 6</a:t>
                       </a:r>
                     </a:p>
                   </a:txBody>
@@ -3690,7 +3690,7 @@
                         <a:rPr sz="900">
                           <a:latin typeface="Segoe UI"/>
                         </a:rPr>
-                        <a:t>Fleet Bound Premium: $381,044.73</a:t>
+                        <a:t>Fleet Bound Premium: $391,213.01</a:t>
                       </a:r>
                     </a:p>
                   </a:txBody>
@@ -3727,7 +3727,7 @@
                         <a:rPr sz="900">
                           <a:latin typeface="Segoe UI"/>
                         </a:rPr>
-                        <a:t>Fleet Book %: 27.8%</a:t>
+                        <a:t>Fleet Book %: 28.5%</a:t>
                       </a:r>
                     </a:p>
                   </a:txBody>
@@ -3766,7 +3766,7 @@
                         <a:rPr sz="900">
                           <a:latin typeface="Segoe UI"/>
                         </a:rPr>
-                        <a:t>Non-Fleet Subs: 392  |  Binds: 42</a:t>
+                        <a:t>Non-Fleet Subs: 395  |  Binds: 40</a:t>
                       </a:r>
                     </a:p>
                   </a:txBody>
@@ -3803,7 +3803,7 @@
                         <a:rPr sz="900">
                           <a:latin typeface="Segoe UI"/>
                         </a:rPr>
-                        <a:t>Non-Fleet Bound Premium: $990,445.71</a:t>
+                        <a:t>Non-Fleet Bound Premium: $980,277.43</a:t>
                       </a:r>
                     </a:p>
                   </a:txBody>
@@ -3840,7 +3840,7 @@
                         <a:rPr sz="900">
                           <a:latin typeface="Segoe UI"/>
                         </a:rPr>
-                        <a:t>Non-Fleet Book %: 72.2%</a:t>
+                        <a:t>Non-Fleet Book %: 71.5%</a:t>
                       </a:r>
                     </a:p>
                   </a:txBody>
@@ -4428,7 +4428,7 @@
                           </a:solidFill>
                           <a:latin typeface="Segoe UI"/>
                         </a:rPr>
-                        <a:t>80</a:t>
+                        <a:t>86</a:t>
                       </a:r>
                     </a:p>
                   </a:txBody>
@@ -4581,7 +4581,7 @@
                         <a:rPr sz="800">
                           <a:latin typeface="Segoe UI"/>
                         </a:rPr>
-                        <a:t>32.3%</a:t>
+                        <a:t>34.3%</a:t>
                       </a:r>
                     </a:p>
                   </a:txBody>
@@ -4707,7 +4707,7 @@
                           </a:solidFill>
                           <a:latin typeface="Segoe UI"/>
                         </a:rPr>
-                        <a:t>16.2%</a:t>
+                        <a:t>15.1%</a:t>
                       </a:r>
                     </a:p>
                   </a:txBody>
@@ -4866,7 +4866,7 @@
                         <a:rPr sz="800">
                           <a:latin typeface="Segoe UI"/>
                         </a:rPr>
-                        <a:t>32</a:t>
+                        <a:t>34</a:t>
                       </a:r>
                     </a:p>
                   </a:txBody>

--- a/generated/Tier 1 Broker Scorecards/Pride Insurance LLC_Broker_Scorecard.pptx
+++ b/generated/Tier 1 Broker Scorecards/Pride Insurance LLC_Broker_Scorecard.pptx
@@ -3394,7 +3394,7 @@
                         <a:rPr sz="900">
                           <a:latin typeface="Segoe UI"/>
                         </a:rPr>
-                        <a:t>Tier 1  |  10.65% / 15.00%</a:t>
+                        <a:t>Tier 1  |  10.39% / 15.00%</a:t>
                       </a:r>
                     </a:p>
                   </a:txBody>
@@ -3690,7 +3690,7 @@
                         <a:rPr sz="900">
                           <a:latin typeface="Segoe UI"/>
                         </a:rPr>
-                        <a:t>Fleet Bound Premium: $391,213.01</a:t>
+                        <a:t>Fleet Bound Premium: $396,521.46</a:t>
                       </a:r>
                     </a:p>
                   </a:txBody>
@@ -3727,7 +3727,7 @@
                         <a:rPr sz="900">
                           <a:latin typeface="Segoe UI"/>
                         </a:rPr>
-                        <a:t>Fleet Book %: 28.5%</a:t>
+                        <a:t>Fleet Book %: 28.9%</a:t>
                       </a:r>
                     </a:p>
                   </a:txBody>
@@ -3766,7 +3766,7 @@
                         <a:rPr sz="900">
                           <a:latin typeface="Segoe UI"/>
                         </a:rPr>
-                        <a:t>Non-Fleet Subs: 395  |  Binds: 40</a:t>
+                        <a:t>Non-Fleet Subs: 396  |  Binds: 39</a:t>
                       </a:r>
                     </a:p>
                   </a:txBody>
@@ -3803,7 +3803,7 @@
                         <a:rPr sz="900">
                           <a:latin typeface="Segoe UI"/>
                         </a:rPr>
-                        <a:t>Non-Fleet Bound Premium: $980,277.43</a:t>
+                        <a:t>Non-Fleet Bound Premium: $974,968.98</a:t>
                       </a:r>
                     </a:p>
                   </a:txBody>
@@ -3840,7 +3840,7 @@
                         <a:rPr sz="900">
                           <a:latin typeface="Segoe UI"/>
                         </a:rPr>
-                        <a:t>Non-Fleet Book %: 71.5%</a:t>
+                        <a:t>Non-Fleet Book %: 71.1%</a:t>
                       </a:r>
                     </a:p>
                   </a:txBody>
@@ -4428,7 +4428,7 @@
                           </a:solidFill>
                           <a:latin typeface="Segoe UI"/>
                         </a:rPr>
-                        <a:t>86</a:t>
+                        <a:t>87</a:t>
                       </a:r>
                     </a:p>
                   </a:txBody>
@@ -4581,7 +4581,7 @@
                         <a:rPr sz="800">
                           <a:latin typeface="Segoe UI"/>
                         </a:rPr>
-                        <a:t>34.3%</a:t>
+                        <a:t>33.3%</a:t>
                       </a:r>
                     </a:p>
                   </a:txBody>
@@ -4624,7 +4624,7 @@
                           </a:solidFill>
                           <a:latin typeface="Segoe UI"/>
                         </a:rPr>
-                        <a:t>19.1%</a:t>
+                        <a:t>18.1%</a:t>
                       </a:r>
                     </a:p>
                   </a:txBody>
@@ -4707,7 +4707,7 @@
                           </a:solidFill>
                           <a:latin typeface="Segoe UI"/>
                         </a:rPr>
-                        <a:t>15.1%</a:t>
+                        <a:t>14.9%</a:t>
                       </a:r>
                     </a:p>
                   </a:txBody>
@@ -4866,7 +4866,7 @@
                         <a:rPr sz="800">
                           <a:latin typeface="Segoe UI"/>
                         </a:rPr>
-                        <a:t>34</a:t>
+                        <a:t>33</a:t>
                       </a:r>
                     </a:p>
                   </a:txBody>
@@ -4906,7 +4906,7 @@
                           </a:solidFill>
                           <a:latin typeface="Segoe UI"/>
                         </a:rPr>
-                        <a:t>18</a:t>
+                        <a:t>17</a:t>
                       </a:r>
                     </a:p>
                   </a:txBody>

--- a/generated/Tier 1 Broker Scorecards/Pride Insurance LLC_Broker_Scorecard.pptx
+++ b/generated/Tier 1 Broker Scorecards/Pride Insurance LLC_Broker_Scorecard.pptx
@@ -3394,7 +3394,7 @@
                         <a:rPr sz="900">
                           <a:latin typeface="Segoe UI"/>
                         </a:rPr>
-                        <a:t>Tier 1  |  10.39% / 15.00%</a:t>
+                        <a:t>Tier 1  |  10.02% / 15.00%</a:t>
                       </a:r>
                     </a:p>
                   </a:txBody>
@@ -3653,7 +3653,7 @@
                         <a:rPr sz="900">
                           <a:latin typeface="Segoe UI"/>
                         </a:rPr>
-                        <a:t>Fleet Subs: 37  |  Binds: 6</a:t>
+                        <a:t>Fleet Subs: 39  |  Binds: 6</a:t>
                       </a:r>
                     </a:p>
                   </a:txBody>
@@ -3690,7 +3690,7 @@
                         <a:rPr sz="900">
                           <a:latin typeface="Segoe UI"/>
                         </a:rPr>
-                        <a:t>Fleet Bound Premium: $396,521.46</a:t>
+                        <a:t>Fleet Bound Premium: $406,766.50</a:t>
                       </a:r>
                     </a:p>
                   </a:txBody>
@@ -3727,7 +3727,7 @@
                         <a:rPr sz="900">
                           <a:latin typeface="Segoe UI"/>
                         </a:rPr>
-                        <a:t>Fleet Book %: 28.9%</a:t>
+                        <a:t>Fleet Book %: 29.7%</a:t>
                       </a:r>
                     </a:p>
                   </a:txBody>
@@ -3766,7 +3766,7 @@
                         <a:rPr sz="900">
                           <a:latin typeface="Segoe UI"/>
                         </a:rPr>
-                        <a:t>Non-Fleet Subs: 396  |  Binds: 39</a:t>
+                        <a:t>Non-Fleet Subs: 400  |  Binds: 38</a:t>
                       </a:r>
                     </a:p>
                   </a:txBody>
@@ -3803,7 +3803,7 @@
                         <a:rPr sz="900">
                           <a:latin typeface="Segoe UI"/>
                         </a:rPr>
-                        <a:t>Non-Fleet Bound Premium: $974,968.98</a:t>
+                        <a:t>Non-Fleet Bound Premium: $964,723.94</a:t>
                       </a:r>
                     </a:p>
                   </a:txBody>
@@ -3840,7 +3840,7 @@
                         <a:rPr sz="900">
                           <a:latin typeface="Segoe UI"/>
                         </a:rPr>
-                        <a:t>Non-Fleet Book %: 71.1%</a:t>
+                        <a:t>Non-Fleet Book %: 70.3%</a:t>
                       </a:r>
                     </a:p>
                   </a:txBody>
@@ -4424,11 +4424,11 @@
                       <a:r>
                         <a:rPr sz="800">
                           <a:solidFill>
-                            <a:srgbClr val="DC2626"/>
+                            <a:srgbClr val="059669"/>
                           </a:solidFill>
                           <a:latin typeface="Segoe UI"/>
                         </a:rPr>
-                        <a:t>87</a:t>
+                        <a:t>93</a:t>
                       </a:r>
                     </a:p>
                   </a:txBody>
@@ -4707,7 +4707,7 @@
                           </a:solidFill>
                           <a:latin typeface="Segoe UI"/>
                         </a:rPr>
-                        <a:t>14.9%</a:t>
+                        <a:t>12.9%</a:t>
                       </a:r>
                     </a:p>
                   </a:txBody>
@@ -4983,7 +4983,7 @@
                           </a:solidFill>
                           <a:latin typeface="Segoe UI"/>
                         </a:rPr>
-                        <a:t>13</a:t>
+                        <a:t>12</a:t>
                       </a:r>
                     </a:p>
                   </a:txBody>

--- a/generated/Tier 1 Broker Scorecards/Pride Insurance LLC_Broker_Scorecard.pptx
+++ b/generated/Tier 1 Broker Scorecards/Pride Insurance LLC_Broker_Scorecard.pptx
@@ -3394,7 +3394,7 @@
                         <a:rPr sz="900">
                           <a:latin typeface="Segoe UI"/>
                         </a:rPr>
-                        <a:t>Tier 1  |  10.02% / 15.00%</a:t>
+                        <a:t>Tier 1  |  10.23% / 15.00%</a:t>
                       </a:r>
                     </a:p>
                   </a:txBody>
@@ -3690,7 +3690,7 @@
                         <a:rPr sz="900">
                           <a:latin typeface="Segoe UI"/>
                         </a:rPr>
-                        <a:t>Fleet Bound Premium: $406,766.50</a:t>
+                        <a:t>Fleet Bound Premium: $401,182.13</a:t>
                       </a:r>
                     </a:p>
                   </a:txBody>
@@ -3727,7 +3727,7 @@
                         <a:rPr sz="900">
                           <a:latin typeface="Segoe UI"/>
                         </a:rPr>
-                        <a:t>Fleet Book %: 29.7%</a:t>
+                        <a:t>Fleet Book %: 29.3%</a:t>
                       </a:r>
                     </a:p>
                   </a:txBody>
@@ -3766,7 +3766,7 @@
                         <a:rPr sz="900">
                           <a:latin typeface="Segoe UI"/>
                         </a:rPr>
-                        <a:t>Non-Fleet Subs: 400  |  Binds: 38</a:t>
+                        <a:t>Non-Fleet Subs: 401  |  Binds: 39</a:t>
                       </a:r>
                     </a:p>
                   </a:txBody>
@@ -3803,7 +3803,7 @@
                         <a:rPr sz="900">
                           <a:latin typeface="Segoe UI"/>
                         </a:rPr>
-                        <a:t>Non-Fleet Bound Premium: $964,723.94</a:t>
+                        <a:t>Non-Fleet Bound Premium: $970,308.31</a:t>
                       </a:r>
                     </a:p>
                   </a:txBody>
@@ -3840,7 +3840,7 @@
                         <a:rPr sz="900">
                           <a:latin typeface="Segoe UI"/>
                         </a:rPr>
-                        <a:t>Non-Fleet Book %: 70.3%</a:t>
+                        <a:t>Non-Fleet Book %: 70.7%</a:t>
                       </a:r>
                     </a:p>
                   </a:txBody>
@@ -4428,7 +4428,7 @@
                           </a:solidFill>
                           <a:latin typeface="Segoe UI"/>
                         </a:rPr>
-                        <a:t>93</a:t>
+                        <a:t>94</a:t>
                       </a:r>
                     </a:p>
                   </a:txBody>
@@ -4581,7 +4581,7 @@
                         <a:rPr sz="800">
                           <a:latin typeface="Segoe UI"/>
                         </a:rPr>
-                        <a:t>33.3%</a:t>
+                        <a:t>34.3%</a:t>
                       </a:r>
                     </a:p>
                   </a:txBody>
@@ -4624,7 +4624,7 @@
                           </a:solidFill>
                           <a:latin typeface="Segoe UI"/>
                         </a:rPr>
-                        <a:t>18.1%</a:t>
+                        <a:t>19.1%</a:t>
                       </a:r>
                     </a:p>
                   </a:txBody>
@@ -4707,7 +4707,7 @@
                           </a:solidFill>
                           <a:latin typeface="Segoe UI"/>
                         </a:rPr>
-                        <a:t>12.9%</a:t>
+                        <a:t>12.8%</a:t>
                       </a:r>
                     </a:p>
                   </a:txBody>
@@ -4866,7 +4866,7 @@
                         <a:rPr sz="800">
                           <a:latin typeface="Segoe UI"/>
                         </a:rPr>
-                        <a:t>33</a:t>
+                        <a:t>34</a:t>
                       </a:r>
                     </a:p>
                   </a:txBody>
@@ -4906,7 +4906,7 @@
                           </a:solidFill>
                           <a:latin typeface="Segoe UI"/>
                         </a:rPr>
-                        <a:t>17</a:t>
+                        <a:t>18</a:t>
                       </a:r>
                     </a:p>
                   </a:txBody>

--- a/generated/Tier 1 Broker Scorecards/Pride Insurance LLC_Broker_Scorecard.pptx
+++ b/generated/Tier 1 Broker Scorecards/Pride Insurance LLC_Broker_Scorecard.pptx
@@ -3357,7 +3357,7 @@
                         <a:rPr sz="800">
                           <a:latin typeface="Segoe UI"/>
                         </a:rPr>
-                        <a:t>$4,586,300.54 / $4,452,264.37 / $1,371,490.44</a:t>
+                        <a:t>$4,586,300.54 / $4,111,282.18 / $1,371,490.44</a:t>
                       </a:r>
                     </a:p>
                   </a:txBody>
@@ -3394,7 +3394,7 @@
                         <a:rPr sz="900">
                           <a:latin typeface="Segoe UI"/>
                         </a:rPr>
-                        <a:t>Tier 1  |  10.23% / 15.00%</a:t>
+                        <a:t>Tier 1  |  9.95% / 15.00%</a:t>
                       </a:r>
                     </a:p>
                   </a:txBody>
@@ -3653,7 +3653,7 @@
                         <a:rPr sz="900">
                           <a:latin typeface="Segoe UI"/>
                         </a:rPr>
-                        <a:t>Fleet Subs: 39  |  Binds: 6</a:t>
+                        <a:t>Fleet Subs: 40  |  Binds: 6</a:t>
                       </a:r>
                     </a:p>
                   </a:txBody>
@@ -3690,7 +3690,7 @@
                         <a:rPr sz="900">
                           <a:latin typeface="Segoe UI"/>
                         </a:rPr>
-                        <a:t>Fleet Bound Premium: $401,182.13</a:t>
+                        <a:t>Fleet Bound Premium: $406,766.50</a:t>
                       </a:r>
                     </a:p>
                   </a:txBody>
@@ -3727,7 +3727,7 @@
                         <a:rPr sz="900">
                           <a:latin typeface="Segoe UI"/>
                         </a:rPr>
-                        <a:t>Fleet Book %: 29.3%</a:t>
+                        <a:t>Fleet Book %: 29.7%</a:t>
                       </a:r>
                     </a:p>
                   </a:txBody>
@@ -3766,7 +3766,7 @@
                         <a:rPr sz="900">
                           <a:latin typeface="Segoe UI"/>
                         </a:rPr>
-                        <a:t>Non-Fleet Subs: 401  |  Binds: 39</a:t>
+                        <a:t>Non-Fleet Subs: 402  |  Binds: 38</a:t>
                       </a:r>
                     </a:p>
                   </a:txBody>
@@ -3803,7 +3803,7 @@
                         <a:rPr sz="900">
                           <a:latin typeface="Segoe UI"/>
                         </a:rPr>
-                        <a:t>Non-Fleet Bound Premium: $970,308.31</a:t>
+                        <a:t>Non-Fleet Bound Premium: $964,723.94</a:t>
                       </a:r>
                     </a:p>
                   </a:txBody>
@@ -3840,7 +3840,7 @@
                         <a:rPr sz="900">
                           <a:latin typeface="Segoe UI"/>
                         </a:rPr>
-                        <a:t>Non-Fleet Book %: 70.7%</a:t>
+                        <a:t>Non-Fleet Book %: 70.3%</a:t>
                       </a:r>
                     </a:p>
                   </a:txBody>
@@ -4428,7 +4428,7 @@
                           </a:solidFill>
                           <a:latin typeface="Segoe UI"/>
                         </a:rPr>
-                        <a:t>94</a:t>
+                        <a:t>96</a:t>
                       </a:r>
                     </a:p>
                   </a:txBody>
@@ -4500,9 +4500,12 @@
                       <a:pPr algn="ctr"/>
                       <a:r>
                         <a:rPr sz="800">
+                          <a:solidFill>
+                            <a:srgbClr val="DC2626"/>
+                          </a:solidFill>
                           <a:latin typeface="Segoe UI"/>
                         </a:rPr>
-                        <a:t/>
+                        <a:t>2</a:t>
                       </a:r>
                     </a:p>
                   </a:txBody>
@@ -4581,7 +4584,7 @@
                         <a:rPr sz="800">
                           <a:latin typeface="Segoe UI"/>
                         </a:rPr>
-                        <a:t>34.3%</a:t>
+                        <a:t>32.3%</a:t>
                       </a:r>
                     </a:p>
                   </a:txBody>
@@ -4624,7 +4627,7 @@
                           </a:solidFill>
                           <a:latin typeface="Segoe UI"/>
                         </a:rPr>
-                        <a:t>19.1%</a:t>
+                        <a:t>18.1%</a:t>
                       </a:r>
                     </a:p>
                   </a:txBody>
@@ -4707,7 +4710,7 @@
                           </a:solidFill>
                           <a:latin typeface="Segoe UI"/>
                         </a:rPr>
-                        <a:t>12.8%</a:t>
+                        <a:t>12.5%</a:t>
                       </a:r>
                     </a:p>
                   </a:txBody>
@@ -4866,7 +4869,7 @@
                         <a:rPr sz="800">
                           <a:latin typeface="Segoe UI"/>
                         </a:rPr>
-                        <a:t>34</a:t>
+                        <a:t>32</a:t>
                       </a:r>
                     </a:p>
                   </a:txBody>
@@ -4906,7 +4909,7 @@
                           </a:solidFill>
                           <a:latin typeface="Segoe UI"/>
                         </a:rPr>
-                        <a:t>18</a:t>
+                        <a:t>17</a:t>
                       </a:r>
                     </a:p>
                   </a:txBody>
